--- a/output/wordlabs-sci-3day.pptx
+++ b/output/wordlabs-sci-3day.pptx
@@ -11511,11 +11511,11 @@
         <p:spPr>
           <a:xfrm>
             <a:off x="1874520" y="4096512"/>
-            <a:ext cx="6903720" cy="804672"/>
+            <a:ext cx="6903720" cy="658368"/>
           </a:xfrm>
           <a:prstGeom prst="rect">
             <a:avLst>
-              <a:gd name="adj" fmla="val 6818"/>
+              <a:gd name="adj" fmla="val 8333"/>
             </a:avLst>
           </a:prstGeom>
           <a:solidFill>
@@ -11537,12 +11537,12 @@
         </p:nvSpPr>
         <p:spPr>
           <a:xfrm>
-            <a:off x="2124837" y="4169664"/>
-            <a:ext cx="685800" cy="384048"/>
+            <a:off x="1952244" y="4169664"/>
+            <a:ext cx="543652" cy="475488"/>
           </a:xfrm>
           <a:prstGeom prst="rect">
             <a:avLst>
-              <a:gd name="adj" fmla="val 9524"/>
+              <a:gd name="adj" fmla="val 7692"/>
             </a:avLst>
           </a:prstGeom>
           <a:solidFill>
@@ -11564,8 +11564,8 @@
         </p:nvSpPr>
         <p:spPr>
           <a:xfrm>
-            <a:off x="2124837" y="4169664"/>
-            <a:ext cx="685800" cy="384048"/>
+            <a:off x="1952244" y="4169664"/>
+            <a:ext cx="543652" cy="475488"/>
           </a:xfrm>
           <a:prstGeom prst="rect">
             <a:avLst/>
@@ -11597,57 +11597,18 @@
       </p:sp>
       <p:sp>
         <p:nvSpPr>
-          <p:cNvPr id="47" name="Text 45"/>
-          <p:cNvSpPr/>
-          <p:nvPr/>
-        </p:nvSpPr>
-        <p:spPr>
-          <a:xfrm>
-            <a:off x="2124837" y="4572000"/>
-            <a:ext cx="685800" cy="219456"/>
-          </a:xfrm>
-          <a:prstGeom prst="rect">
-            <a:avLst/>
-          </a:prstGeom>
-          <a:noFill/>
-          <a:ln/>
-        </p:spPr>
-        <p:txBody>
-          <a:bodyPr wrap="square" lIns="0" tIns="0" rIns="0" bIns="0" rtlCol="0" anchor="t"/>
-          <a:lstStyle/>
-          <a:p>
-            <a:pPr algn="ctr" indent="0" marL="0">
-              <a:buNone/>
-            </a:pPr>
-            <a:r>
-              <a:rPr lang="en-US" sz="750" i="1" dirty="0">
-                <a:solidFill>
-                  <a:srgbClr val="94A3B8"/>
-                </a:solidFill>
-                <a:latin typeface="Calibri" pitchFamily="34" charset="0"/>
-                <a:ea typeface="Calibri" pitchFamily="34" charset="-122"/>
-                <a:cs typeface="Calibri" pitchFamily="34" charset="-120"/>
-              </a:rPr>
-              <a:t>/k/</a:t>
-            </a:r>
-            <a:endParaRPr lang="en-US" sz="750" dirty="0"/>
-          </a:p>
-        </p:txBody>
-      </p:sp>
-      <p:sp>
-        <p:nvSpPr>
-          <p:cNvPr id="48" name="Shape 46"/>
-          <p:cNvSpPr/>
-          <p:nvPr/>
-        </p:nvSpPr>
-        <p:spPr>
-          <a:xfrm>
-            <a:off x="3033522" y="4169664"/>
-            <a:ext cx="685800" cy="384048"/>
+          <p:cNvPr id="47" name="Shape 45"/>
+          <p:cNvSpPr/>
+          <p:nvPr/>
+        </p:nvSpPr>
+        <p:spPr>
+          <a:xfrm>
+            <a:off x="2546188" y="4169664"/>
+            <a:ext cx="543652" cy="475488"/>
           </a:xfrm>
           <a:prstGeom prst="rect">
             <a:avLst>
-              <a:gd name="adj" fmla="val 9524"/>
+              <a:gd name="adj" fmla="val 7692"/>
             </a:avLst>
           </a:prstGeom>
           <a:solidFill>
@@ -11663,14 +11624,14 @@
       </p:sp>
       <p:sp>
         <p:nvSpPr>
-          <p:cNvPr id="49" name="Text 47"/>
-          <p:cNvSpPr/>
-          <p:nvPr/>
-        </p:nvSpPr>
-        <p:spPr>
-          <a:xfrm>
-            <a:off x="3033522" y="4169664"/>
-            <a:ext cx="685800" cy="384048"/>
+          <p:cNvPr id="48" name="Text 46"/>
+          <p:cNvSpPr/>
+          <p:nvPr/>
+        </p:nvSpPr>
+        <p:spPr>
+          <a:xfrm>
+            <a:off x="2546188" y="4169664"/>
+            <a:ext cx="543652" cy="475488"/>
           </a:xfrm>
           <a:prstGeom prst="rect">
             <a:avLst/>
@@ -11694,7 +11655,7 @@
                 <a:ea typeface="Trebuchet MS" pitchFamily="34" charset="-122"/>
                 <a:cs typeface="Trebuchet MS" pitchFamily="34" charset="-120"/>
               </a:rPr>
-              <a:t>on</a:t>
+              <a:t>o</a:t>
             </a:r>
             <a:endParaRPr lang="en-US" sz="900" dirty="0"/>
           </a:p>
@@ -11702,18 +11663,18 @@
       </p:sp>
       <p:sp>
         <p:nvSpPr>
-          <p:cNvPr id="50" name="Shape 48"/>
-          <p:cNvSpPr/>
-          <p:nvPr/>
-        </p:nvSpPr>
-        <p:spPr>
-          <a:xfrm>
-            <a:off x="3942207" y="4169664"/>
-            <a:ext cx="685800" cy="384048"/>
+          <p:cNvPr id="49" name="Shape 47"/>
+          <p:cNvSpPr/>
+          <p:nvPr/>
+        </p:nvSpPr>
+        <p:spPr>
+          <a:xfrm>
+            <a:off x="3140133" y="4169664"/>
+            <a:ext cx="543652" cy="475488"/>
           </a:xfrm>
           <a:prstGeom prst="rect">
             <a:avLst>
-              <a:gd name="adj" fmla="val 9524"/>
+              <a:gd name="adj" fmla="val 7692"/>
             </a:avLst>
           </a:prstGeom>
           <a:solidFill>
@@ -11729,14 +11690,14 @@
       </p:sp>
       <p:sp>
         <p:nvSpPr>
-          <p:cNvPr id="51" name="Text 49"/>
-          <p:cNvSpPr/>
-          <p:nvPr/>
-        </p:nvSpPr>
-        <p:spPr>
-          <a:xfrm>
-            <a:off x="3942207" y="4169664"/>
-            <a:ext cx="685800" cy="384048"/>
+          <p:cNvPr id="50" name="Text 48"/>
+          <p:cNvSpPr/>
+          <p:nvPr/>
+        </p:nvSpPr>
+        <p:spPr>
+          <a:xfrm>
+            <a:off x="3140133" y="4169664"/>
+            <a:ext cx="543652" cy="475488"/>
           </a:xfrm>
           <a:prstGeom prst="rect">
             <a:avLst/>
@@ -11760,7 +11721,7 @@
                 <a:ea typeface="Trebuchet MS" pitchFamily="34" charset="-122"/>
                 <a:cs typeface="Trebuchet MS" pitchFamily="34" charset="-120"/>
               </a:rPr>
-              <a:t>sh</a:t>
+              <a:t>n</a:t>
             </a:r>
             <a:endParaRPr lang="en-US" sz="900" dirty="0"/>
           </a:p>
@@ -11768,80 +11729,41 @@
       </p:sp>
       <p:sp>
         <p:nvSpPr>
+          <p:cNvPr id="51" name="Shape 49"/>
+          <p:cNvSpPr/>
+          <p:nvPr/>
+        </p:nvSpPr>
+        <p:spPr>
+          <a:xfrm>
+            <a:off x="3734077" y="4169664"/>
+            <a:ext cx="543652" cy="475488"/>
+          </a:xfrm>
+          <a:prstGeom prst="rect">
+            <a:avLst>
+              <a:gd name="adj" fmla="val 7692"/>
+            </a:avLst>
+          </a:prstGeom>
+          <a:solidFill>
+            <a:srgbClr val="FFFFFF"/>
+          </a:solidFill>
+          <a:ln w="12700">
+            <a:solidFill>
+              <a:srgbClr val="DB2777"/>
+            </a:solidFill>
+            <a:prstDash val="solid"/>
+          </a:ln>
+        </p:spPr>
+      </p:sp>
+      <p:sp>
+        <p:nvSpPr>
           <p:cNvPr id="52" name="Text 50"/>
           <p:cNvSpPr/>
           <p:nvPr/>
         </p:nvSpPr>
         <p:spPr>
           <a:xfrm>
-            <a:off x="3942207" y="4572000"/>
-            <a:ext cx="685800" cy="219456"/>
-          </a:xfrm>
-          <a:prstGeom prst="rect">
-            <a:avLst/>
-          </a:prstGeom>
-          <a:noFill/>
-          <a:ln/>
-        </p:spPr>
-        <p:txBody>
-          <a:bodyPr wrap="square" lIns="0" tIns="0" rIns="0" bIns="0" rtlCol="0" anchor="t"/>
-          <a:lstStyle/>
-          <a:p>
-            <a:pPr algn="ctr" indent="0" marL="0">
-              <a:buNone/>
-            </a:pPr>
-            <a:r>
-              <a:rPr lang="en-US" sz="750" i="1" dirty="0">
-                <a:solidFill>
-                  <a:srgbClr val="94A3B8"/>
-                </a:solidFill>
-                <a:latin typeface="Calibri" pitchFamily="34" charset="0"/>
-                <a:ea typeface="Calibri" pitchFamily="34" charset="-122"/>
-                <a:cs typeface="Calibri" pitchFamily="34" charset="-120"/>
-              </a:rPr>
-              <a:t>/sh/</a:t>
-            </a:r>
-            <a:endParaRPr lang="en-US" sz="750" dirty="0"/>
-          </a:p>
-        </p:txBody>
-      </p:sp>
-      <p:sp>
-        <p:nvSpPr>
-          <p:cNvPr id="53" name="Shape 51"/>
-          <p:cNvSpPr/>
-          <p:nvPr/>
-        </p:nvSpPr>
-        <p:spPr>
-          <a:xfrm>
-            <a:off x="4850892" y="4169664"/>
-            <a:ext cx="685800" cy="384048"/>
-          </a:xfrm>
-          <a:prstGeom prst="rect">
-            <a:avLst>
-              <a:gd name="adj" fmla="val 9524"/>
-            </a:avLst>
-          </a:prstGeom>
-          <a:solidFill>
-            <a:srgbClr val="FFFFFF"/>
-          </a:solidFill>
-          <a:ln w="12700">
-            <a:solidFill>
-              <a:srgbClr val="DB2777"/>
-            </a:solidFill>
-            <a:prstDash val="solid"/>
-          </a:ln>
-        </p:spPr>
-      </p:sp>
-      <p:sp>
-        <p:nvSpPr>
-          <p:cNvPr id="54" name="Text 52"/>
-          <p:cNvSpPr/>
-          <p:nvPr/>
-        </p:nvSpPr>
-        <p:spPr>
-          <a:xfrm>
-            <a:off x="4850892" y="4169664"/>
-            <a:ext cx="685800" cy="384048"/>
+            <a:off x="3734077" y="4169664"/>
+            <a:ext cx="543652" cy="475488"/>
           </a:xfrm>
           <a:prstGeom prst="rect">
             <a:avLst/>
@@ -11865,7 +11787,7 @@
                 <a:ea typeface="Trebuchet MS" pitchFamily="34" charset="-122"/>
                 <a:cs typeface="Trebuchet MS" pitchFamily="34" charset="-120"/>
               </a:rPr>
-              <a:t>i</a:t>
+              <a:t>s</a:t>
             </a:r>
             <a:endParaRPr lang="en-US" sz="900" dirty="0"/>
           </a:p>
@@ -11873,18 +11795,18 @@
       </p:sp>
       <p:sp>
         <p:nvSpPr>
-          <p:cNvPr id="55" name="Shape 53"/>
-          <p:cNvSpPr/>
-          <p:nvPr/>
-        </p:nvSpPr>
-        <p:spPr>
-          <a:xfrm>
-            <a:off x="5759577" y="4169664"/>
-            <a:ext cx="685800" cy="384048"/>
+          <p:cNvPr id="53" name="Shape 51"/>
+          <p:cNvSpPr/>
+          <p:nvPr/>
+        </p:nvSpPr>
+        <p:spPr>
+          <a:xfrm>
+            <a:off x="4328021" y="4169664"/>
+            <a:ext cx="543652" cy="475488"/>
           </a:xfrm>
           <a:prstGeom prst="rect">
             <a:avLst>
-              <a:gd name="adj" fmla="val 9524"/>
+              <a:gd name="adj" fmla="val 7692"/>
             </a:avLst>
           </a:prstGeom>
           <a:solidFill>
@@ -11900,14 +11822,14 @@
       </p:sp>
       <p:sp>
         <p:nvSpPr>
-          <p:cNvPr id="56" name="Text 54"/>
-          <p:cNvSpPr/>
-          <p:nvPr/>
-        </p:nvSpPr>
-        <p:spPr>
-          <a:xfrm>
-            <a:off x="5759577" y="4169664"/>
-            <a:ext cx="685800" cy="384048"/>
+          <p:cNvPr id="54" name="Text 52"/>
+          <p:cNvSpPr/>
+          <p:nvPr/>
+        </p:nvSpPr>
+        <p:spPr>
+          <a:xfrm>
+            <a:off x="4328021" y="4169664"/>
+            <a:ext cx="543652" cy="475488"/>
           </a:xfrm>
           <a:prstGeom prst="rect">
             <a:avLst/>
@@ -11931,7 +11853,7 @@
                 <a:ea typeface="Trebuchet MS" pitchFamily="34" charset="-122"/>
                 <a:cs typeface="Trebuchet MS" pitchFamily="34" charset="-120"/>
               </a:rPr>
-              <a:t>en</a:t>
+              <a:t>c</a:t>
             </a:r>
             <a:endParaRPr lang="en-US" sz="900" dirty="0"/>
           </a:p>
@@ -11939,18 +11861,18 @@
       </p:sp>
       <p:sp>
         <p:nvSpPr>
-          <p:cNvPr id="57" name="Shape 55"/>
-          <p:cNvSpPr/>
-          <p:nvPr/>
-        </p:nvSpPr>
-        <p:spPr>
-          <a:xfrm>
-            <a:off x="6668262" y="4169664"/>
-            <a:ext cx="685800" cy="384048"/>
+          <p:cNvPr id="55" name="Shape 53"/>
+          <p:cNvSpPr/>
+          <p:nvPr/>
+        </p:nvSpPr>
+        <p:spPr>
+          <a:xfrm>
+            <a:off x="4921966" y="4169664"/>
+            <a:ext cx="543652" cy="475488"/>
           </a:xfrm>
           <a:prstGeom prst="rect">
             <a:avLst>
-              <a:gd name="adj" fmla="val 9524"/>
+              <a:gd name="adj" fmla="val 7692"/>
             </a:avLst>
           </a:prstGeom>
           <a:solidFill>
@@ -11966,14 +11888,14 @@
       </p:sp>
       <p:sp>
         <p:nvSpPr>
-          <p:cNvPr id="58" name="Text 56"/>
-          <p:cNvSpPr/>
-          <p:nvPr/>
-        </p:nvSpPr>
-        <p:spPr>
-          <a:xfrm>
-            <a:off x="6668262" y="4169664"/>
-            <a:ext cx="685800" cy="384048"/>
+          <p:cNvPr id="56" name="Text 54"/>
+          <p:cNvSpPr/>
+          <p:nvPr/>
+        </p:nvSpPr>
+        <p:spPr>
+          <a:xfrm>
+            <a:off x="4921966" y="4169664"/>
+            <a:ext cx="543652" cy="475488"/>
           </a:xfrm>
           <a:prstGeom prst="rect">
             <a:avLst/>
@@ -11997,7 +11919,7 @@
                 <a:ea typeface="Trebuchet MS" pitchFamily="34" charset="-122"/>
                 <a:cs typeface="Trebuchet MS" pitchFamily="34" charset="-120"/>
               </a:rPr>
-              <a:t>t</a:t>
+              <a:t>ie</a:t>
             </a:r>
             <a:endParaRPr lang="en-US" sz="900" dirty="0"/>
           </a:p>
@@ -12005,18 +11927,18 @@
       </p:sp>
       <p:sp>
         <p:nvSpPr>
-          <p:cNvPr id="59" name="Shape 57"/>
-          <p:cNvSpPr/>
-          <p:nvPr/>
-        </p:nvSpPr>
-        <p:spPr>
-          <a:xfrm>
-            <a:off x="7576947" y="4169664"/>
-            <a:ext cx="685800" cy="384048"/>
+          <p:cNvPr id="57" name="Shape 55"/>
+          <p:cNvSpPr/>
+          <p:nvPr/>
+        </p:nvSpPr>
+        <p:spPr>
+          <a:xfrm>
+            <a:off x="5515910" y="4169664"/>
+            <a:ext cx="543652" cy="475488"/>
           </a:xfrm>
           <a:prstGeom prst="rect">
             <a:avLst>
-              <a:gd name="adj" fmla="val 9524"/>
+              <a:gd name="adj" fmla="val 7692"/>
             </a:avLst>
           </a:prstGeom>
           <a:solidFill>
@@ -12032,14 +11954,14 @@
       </p:sp>
       <p:sp>
         <p:nvSpPr>
-          <p:cNvPr id="60" name="Text 58"/>
-          <p:cNvSpPr/>
-          <p:nvPr/>
-        </p:nvSpPr>
-        <p:spPr>
-          <a:xfrm>
-            <a:off x="7576947" y="4169664"/>
-            <a:ext cx="685800" cy="384048"/>
+          <p:cNvPr id="58" name="Text 56"/>
+          <p:cNvSpPr/>
+          <p:nvPr/>
+        </p:nvSpPr>
+        <p:spPr>
+          <a:xfrm>
+            <a:off x="5515910" y="4169664"/>
+            <a:ext cx="543652" cy="475488"/>
           </a:xfrm>
           <a:prstGeom prst="rect">
             <a:avLst/>
@@ -12063,7 +11985,7 @@
                 <a:ea typeface="Trebuchet MS" pitchFamily="34" charset="-122"/>
                 <a:cs typeface="Trebuchet MS" pitchFamily="34" charset="-120"/>
               </a:rPr>
-              <a:t>ious</a:t>
+              <a:t>n</a:t>
             </a:r>
             <a:endParaRPr lang="en-US" sz="900" dirty="0"/>
           </a:p>
@@ -12071,40 +11993,265 @@
       </p:sp>
       <p:sp>
         <p:nvSpPr>
-          <p:cNvPr id="61" name="Text 59"/>
-          <p:cNvSpPr/>
-          <p:nvPr/>
-        </p:nvSpPr>
-        <p:spPr>
-          <a:xfrm>
-            <a:off x="7576947" y="4572000"/>
-            <a:ext cx="685800" cy="219456"/>
-          </a:xfrm>
-          <a:prstGeom prst="rect">
-            <a:avLst/>
-          </a:prstGeom>
-          <a:noFill/>
-          <a:ln/>
-        </p:spPr>
-        <p:txBody>
-          <a:bodyPr wrap="square" lIns="0" tIns="0" rIns="0" bIns="0" rtlCol="0" anchor="t"/>
-          <a:lstStyle/>
-          <a:p>
-            <a:pPr algn="ctr" indent="0" marL="0">
-              <a:buNone/>
-            </a:pPr>
-            <a:r>
-              <a:rPr lang="en-US" sz="750" i="1" dirty="0">
-                <a:solidFill>
-                  <a:srgbClr val="94A3B8"/>
-                </a:solidFill>
-                <a:latin typeface="Calibri" pitchFamily="34" charset="0"/>
-                <a:ea typeface="Calibri" pitchFamily="34" charset="-122"/>
-                <a:cs typeface="Calibri" pitchFamily="34" charset="-120"/>
-              </a:rPr>
-              <a:t>/us/</a:t>
-            </a:r>
-            <a:endParaRPr lang="en-US" sz="750" dirty="0"/>
+          <p:cNvPr id="59" name="Shape 57"/>
+          <p:cNvSpPr/>
+          <p:nvPr/>
+        </p:nvSpPr>
+        <p:spPr>
+          <a:xfrm>
+            <a:off x="6109855" y="4169664"/>
+            <a:ext cx="543652" cy="475488"/>
+          </a:xfrm>
+          <a:prstGeom prst="rect">
+            <a:avLst>
+              <a:gd name="adj" fmla="val 7692"/>
+            </a:avLst>
+          </a:prstGeom>
+          <a:solidFill>
+            <a:srgbClr val="FFFFFF"/>
+          </a:solidFill>
+          <a:ln w="12700">
+            <a:solidFill>
+              <a:srgbClr val="DB2777"/>
+            </a:solidFill>
+            <a:prstDash val="solid"/>
+          </a:ln>
+        </p:spPr>
+      </p:sp>
+      <p:sp>
+        <p:nvSpPr>
+          <p:cNvPr id="60" name="Text 58"/>
+          <p:cNvSpPr/>
+          <p:nvPr/>
+        </p:nvSpPr>
+        <p:spPr>
+          <a:xfrm>
+            <a:off x="6109855" y="4169664"/>
+            <a:ext cx="543652" cy="475488"/>
+          </a:xfrm>
+          <a:prstGeom prst="rect">
+            <a:avLst/>
+          </a:prstGeom>
+          <a:noFill/>
+          <a:ln/>
+        </p:spPr>
+        <p:txBody>
+          <a:bodyPr wrap="square" lIns="0" tIns="0" rIns="0" bIns="0" rtlCol="0" anchor="ctr"/>
+          <a:lstStyle/>
+          <a:p>
+            <a:pPr algn="ctr" indent="0" marL="0">
+              <a:buNone/>
+            </a:pPr>
+            <a:r>
+              <a:rPr lang="en-US" sz="900" b="1" dirty="0">
+                <a:solidFill>
+                  <a:srgbClr val="9D174D"/>
+                </a:solidFill>
+                <a:latin typeface="Trebuchet MS" pitchFamily="34" charset="0"/>
+                <a:ea typeface="Trebuchet MS" pitchFamily="34" charset="-122"/>
+                <a:cs typeface="Trebuchet MS" pitchFamily="34" charset="-120"/>
+              </a:rPr>
+              <a:t>t</a:t>
+            </a:r>
+            <a:endParaRPr lang="en-US" sz="900" dirty="0"/>
+          </a:p>
+        </p:txBody>
+      </p:sp>
+      <p:sp>
+        <p:nvSpPr>
+          <p:cNvPr id="61" name="Shape 59"/>
+          <p:cNvSpPr/>
+          <p:nvPr/>
+        </p:nvSpPr>
+        <p:spPr>
+          <a:xfrm>
+            <a:off x="6703799" y="4169664"/>
+            <a:ext cx="543652" cy="475488"/>
+          </a:xfrm>
+          <a:prstGeom prst="rect">
+            <a:avLst>
+              <a:gd name="adj" fmla="val 7692"/>
+            </a:avLst>
+          </a:prstGeom>
+          <a:solidFill>
+            <a:srgbClr val="FFFFFF"/>
+          </a:solidFill>
+          <a:ln w="12700">
+            <a:solidFill>
+              <a:srgbClr val="DB2777"/>
+            </a:solidFill>
+            <a:prstDash val="solid"/>
+          </a:ln>
+        </p:spPr>
+      </p:sp>
+      <p:sp>
+        <p:nvSpPr>
+          <p:cNvPr id="62" name="Text 60"/>
+          <p:cNvSpPr/>
+          <p:nvPr/>
+        </p:nvSpPr>
+        <p:spPr>
+          <a:xfrm>
+            <a:off x="6703799" y="4169664"/>
+            <a:ext cx="543652" cy="475488"/>
+          </a:xfrm>
+          <a:prstGeom prst="rect">
+            <a:avLst/>
+          </a:prstGeom>
+          <a:noFill/>
+          <a:ln/>
+        </p:spPr>
+        <p:txBody>
+          <a:bodyPr wrap="square" lIns="0" tIns="0" rIns="0" bIns="0" rtlCol="0" anchor="ctr"/>
+          <a:lstStyle/>
+          <a:p>
+            <a:pPr algn="ctr" indent="0" marL="0">
+              <a:buNone/>
+            </a:pPr>
+            <a:r>
+              <a:rPr lang="en-US" sz="900" b="1" dirty="0">
+                <a:solidFill>
+                  <a:srgbClr val="9D174D"/>
+                </a:solidFill>
+                <a:latin typeface="Trebuchet MS" pitchFamily="34" charset="0"/>
+                <a:ea typeface="Trebuchet MS" pitchFamily="34" charset="-122"/>
+                <a:cs typeface="Trebuchet MS" pitchFamily="34" charset="-120"/>
+              </a:rPr>
+              <a:t>i</a:t>
+            </a:r>
+            <a:endParaRPr lang="en-US" sz="900" dirty="0"/>
+          </a:p>
+        </p:txBody>
+      </p:sp>
+      <p:sp>
+        <p:nvSpPr>
+          <p:cNvPr id="63" name="Shape 61"/>
+          <p:cNvSpPr/>
+          <p:nvPr/>
+        </p:nvSpPr>
+        <p:spPr>
+          <a:xfrm>
+            <a:off x="7297743" y="4169664"/>
+            <a:ext cx="543652" cy="475488"/>
+          </a:xfrm>
+          <a:prstGeom prst="rect">
+            <a:avLst>
+              <a:gd name="adj" fmla="val 7692"/>
+            </a:avLst>
+          </a:prstGeom>
+          <a:solidFill>
+            <a:srgbClr val="FFFFFF"/>
+          </a:solidFill>
+          <a:ln w="12700">
+            <a:solidFill>
+              <a:srgbClr val="DB2777"/>
+            </a:solidFill>
+            <a:prstDash val="solid"/>
+          </a:ln>
+        </p:spPr>
+      </p:sp>
+      <p:sp>
+        <p:nvSpPr>
+          <p:cNvPr id="64" name="Text 62"/>
+          <p:cNvSpPr/>
+          <p:nvPr/>
+        </p:nvSpPr>
+        <p:spPr>
+          <a:xfrm>
+            <a:off x="7297743" y="4169664"/>
+            <a:ext cx="543652" cy="475488"/>
+          </a:xfrm>
+          <a:prstGeom prst="rect">
+            <a:avLst/>
+          </a:prstGeom>
+          <a:noFill/>
+          <a:ln/>
+        </p:spPr>
+        <p:txBody>
+          <a:bodyPr wrap="square" lIns="0" tIns="0" rIns="0" bIns="0" rtlCol="0" anchor="ctr"/>
+          <a:lstStyle/>
+          <a:p>
+            <a:pPr algn="ctr" indent="0" marL="0">
+              <a:buNone/>
+            </a:pPr>
+            <a:r>
+              <a:rPr lang="en-US" sz="900" b="1" dirty="0">
+                <a:solidFill>
+                  <a:srgbClr val="9D174D"/>
+                </a:solidFill>
+                <a:latin typeface="Trebuchet MS" pitchFamily="34" charset="0"/>
+                <a:ea typeface="Trebuchet MS" pitchFamily="34" charset="-122"/>
+                <a:cs typeface="Trebuchet MS" pitchFamily="34" charset="-120"/>
+              </a:rPr>
+              <a:t>ou</a:t>
+            </a:r>
+            <a:endParaRPr lang="en-US" sz="900" dirty="0"/>
+          </a:p>
+        </p:txBody>
+      </p:sp>
+      <p:sp>
+        <p:nvSpPr>
+          <p:cNvPr id="65" name="Shape 63"/>
+          <p:cNvSpPr/>
+          <p:nvPr/>
+        </p:nvSpPr>
+        <p:spPr>
+          <a:xfrm>
+            <a:off x="7891688" y="4169664"/>
+            <a:ext cx="543652" cy="475488"/>
+          </a:xfrm>
+          <a:prstGeom prst="rect">
+            <a:avLst>
+              <a:gd name="adj" fmla="val 7692"/>
+            </a:avLst>
+          </a:prstGeom>
+          <a:solidFill>
+            <a:srgbClr val="FFFFFF"/>
+          </a:solidFill>
+          <a:ln w="12700">
+            <a:solidFill>
+              <a:srgbClr val="DB2777"/>
+            </a:solidFill>
+            <a:prstDash val="solid"/>
+          </a:ln>
+        </p:spPr>
+      </p:sp>
+      <p:sp>
+        <p:nvSpPr>
+          <p:cNvPr id="66" name="Text 64"/>
+          <p:cNvSpPr/>
+          <p:nvPr/>
+        </p:nvSpPr>
+        <p:spPr>
+          <a:xfrm>
+            <a:off x="7891688" y="4169664"/>
+            <a:ext cx="543652" cy="475488"/>
+          </a:xfrm>
+          <a:prstGeom prst="rect">
+            <a:avLst/>
+          </a:prstGeom>
+          <a:noFill/>
+          <a:ln/>
+        </p:spPr>
+        <p:txBody>
+          <a:bodyPr wrap="square" lIns="0" tIns="0" rIns="0" bIns="0" rtlCol="0" anchor="ctr"/>
+          <a:lstStyle/>
+          <a:p>
+            <a:pPr algn="ctr" indent="0" marL="0">
+              <a:buNone/>
+            </a:pPr>
+            <a:r>
+              <a:rPr lang="en-US" sz="900" b="1" dirty="0">
+                <a:solidFill>
+                  <a:srgbClr val="9D174D"/>
+                </a:solidFill>
+                <a:latin typeface="Trebuchet MS" pitchFamily="34" charset="0"/>
+                <a:ea typeface="Trebuchet MS" pitchFamily="34" charset="-122"/>
+                <a:cs typeface="Trebuchet MS" pitchFamily="34" charset="-120"/>
+              </a:rPr>
+              <a:t>s</a:t>
+            </a:r>
+            <a:endParaRPr lang="en-US" sz="900" dirty="0"/>
           </a:p>
         </p:txBody>
       </p:sp>
@@ -30018,11 +30165,11 @@
         <p:spPr>
           <a:xfrm>
             <a:off x="1874520" y="4096512"/>
-            <a:ext cx="6903720" cy="804672"/>
+            <a:ext cx="6903720" cy="658368"/>
           </a:xfrm>
           <a:prstGeom prst="rect">
             <a:avLst>
-              <a:gd name="adj" fmla="val 6818"/>
+              <a:gd name="adj" fmla="val 8333"/>
             </a:avLst>
           </a:prstGeom>
           <a:solidFill>
@@ -30044,12 +30191,12 @@
         </p:nvSpPr>
         <p:spPr>
           <a:xfrm>
-            <a:off x="2254649" y="4169664"/>
-            <a:ext cx="685800" cy="384048"/>
+            <a:off x="1951330" y="4169664"/>
+            <a:ext cx="676656" cy="475488"/>
           </a:xfrm>
           <a:prstGeom prst="rect">
             <a:avLst>
-              <a:gd name="adj" fmla="val 9524"/>
+              <a:gd name="adj" fmla="val 7692"/>
             </a:avLst>
           </a:prstGeom>
           <a:solidFill>
@@ -30071,8 +30218,8 @@
         </p:nvSpPr>
         <p:spPr>
           <a:xfrm>
-            <a:off x="2254649" y="4169664"/>
-            <a:ext cx="685800" cy="384048"/>
+            <a:off x="1951330" y="4169664"/>
+            <a:ext cx="676656" cy="475488"/>
           </a:xfrm>
           <a:prstGeom prst="rect">
             <a:avLst/>
@@ -30104,57 +30251,18 @@
       </p:sp>
       <p:sp>
         <p:nvSpPr>
-          <p:cNvPr id="41" name="Text 39"/>
-          <p:cNvSpPr/>
-          <p:nvPr/>
-        </p:nvSpPr>
-        <p:spPr>
-          <a:xfrm>
-            <a:off x="2254649" y="4572000"/>
-            <a:ext cx="685800" cy="219456"/>
-          </a:xfrm>
-          <a:prstGeom prst="rect">
-            <a:avLst/>
-          </a:prstGeom>
-          <a:noFill/>
-          <a:ln/>
-        </p:spPr>
-        <p:txBody>
-          <a:bodyPr wrap="square" lIns="0" tIns="0" rIns="0" bIns="0" rtlCol="0" anchor="t"/>
-          <a:lstStyle/>
-          <a:p>
-            <a:pPr algn="ctr" indent="0" marL="0">
-              <a:buNone/>
-            </a:pPr>
-            <a:r>
-              <a:rPr lang="en-US" sz="750" i="1" dirty="0">
-                <a:solidFill>
-                  <a:srgbClr val="94A3B8"/>
-                </a:solidFill>
-                <a:latin typeface="Calibri" pitchFamily="34" charset="0"/>
-                <a:ea typeface="Calibri" pitchFamily="34" charset="-122"/>
-                <a:cs typeface="Calibri" pitchFamily="34" charset="-120"/>
-              </a:rPr>
-              <a:t>/k/</a:t>
-            </a:r>
-            <a:endParaRPr lang="en-US" sz="750" dirty="0"/>
-          </a:p>
-        </p:txBody>
-      </p:sp>
-      <p:sp>
-        <p:nvSpPr>
-          <p:cNvPr id="42" name="Shape 40"/>
-          <p:cNvSpPr/>
-          <p:nvPr/>
-        </p:nvSpPr>
-        <p:spPr>
-          <a:xfrm>
-            <a:off x="3293146" y="4169664"/>
-            <a:ext cx="685800" cy="384048"/>
+          <p:cNvPr id="41" name="Shape 39"/>
+          <p:cNvSpPr/>
+          <p:nvPr/>
+        </p:nvSpPr>
+        <p:spPr>
+          <a:xfrm>
+            <a:off x="2677363" y="4169664"/>
+            <a:ext cx="676656" cy="475488"/>
           </a:xfrm>
           <a:prstGeom prst="rect">
             <a:avLst>
-              <a:gd name="adj" fmla="val 9524"/>
+              <a:gd name="adj" fmla="val 7692"/>
             </a:avLst>
           </a:prstGeom>
           <a:solidFill>
@@ -30170,14 +30278,14 @@
       </p:sp>
       <p:sp>
         <p:nvSpPr>
-          <p:cNvPr id="43" name="Text 41"/>
-          <p:cNvSpPr/>
-          <p:nvPr/>
-        </p:nvSpPr>
-        <p:spPr>
-          <a:xfrm>
-            <a:off x="3293146" y="4169664"/>
-            <a:ext cx="685800" cy="384048"/>
+          <p:cNvPr id="42" name="Text 40"/>
+          <p:cNvSpPr/>
+          <p:nvPr/>
+        </p:nvSpPr>
+        <p:spPr>
+          <a:xfrm>
+            <a:off x="2677363" y="4169664"/>
+            <a:ext cx="676656" cy="475488"/>
           </a:xfrm>
           <a:prstGeom prst="rect">
             <a:avLst/>
@@ -30201,7 +30309,7 @@
                 <a:ea typeface="Trebuchet MS" pitchFamily="34" charset="-122"/>
                 <a:cs typeface="Trebuchet MS" pitchFamily="34" charset="-120"/>
               </a:rPr>
-              <a:t>on</a:t>
+              <a:t>o</a:t>
             </a:r>
             <a:endParaRPr lang="en-US" sz="900" dirty="0"/>
           </a:p>
@@ -30209,18 +30317,18 @@
       </p:sp>
       <p:sp>
         <p:nvSpPr>
-          <p:cNvPr id="44" name="Shape 42"/>
-          <p:cNvSpPr/>
-          <p:nvPr/>
-        </p:nvSpPr>
-        <p:spPr>
-          <a:xfrm>
-            <a:off x="4331643" y="4169664"/>
-            <a:ext cx="685800" cy="384048"/>
+          <p:cNvPr id="43" name="Shape 41"/>
+          <p:cNvSpPr/>
+          <p:nvPr/>
+        </p:nvSpPr>
+        <p:spPr>
+          <a:xfrm>
+            <a:off x="3403397" y="4169664"/>
+            <a:ext cx="676656" cy="475488"/>
           </a:xfrm>
           <a:prstGeom prst="rect">
             <a:avLst>
-              <a:gd name="adj" fmla="val 9524"/>
+              <a:gd name="adj" fmla="val 7692"/>
             </a:avLst>
           </a:prstGeom>
           <a:solidFill>
@@ -30236,14 +30344,14 @@
       </p:sp>
       <p:sp>
         <p:nvSpPr>
-          <p:cNvPr id="45" name="Text 43"/>
-          <p:cNvSpPr/>
-          <p:nvPr/>
-        </p:nvSpPr>
-        <p:spPr>
-          <a:xfrm>
-            <a:off x="4331643" y="4169664"/>
-            <a:ext cx="685800" cy="384048"/>
+          <p:cNvPr id="44" name="Text 42"/>
+          <p:cNvSpPr/>
+          <p:nvPr/>
+        </p:nvSpPr>
+        <p:spPr>
+          <a:xfrm>
+            <a:off x="3403397" y="4169664"/>
+            <a:ext cx="676656" cy="475488"/>
           </a:xfrm>
           <a:prstGeom prst="rect">
             <a:avLst/>
@@ -30267,7 +30375,7 @@
                 <a:ea typeface="Trebuchet MS" pitchFamily="34" charset="-122"/>
                 <a:cs typeface="Trebuchet MS" pitchFamily="34" charset="-120"/>
               </a:rPr>
-              <a:t>sh</a:t>
+              <a:t>n</a:t>
             </a:r>
             <a:endParaRPr lang="en-US" sz="900" dirty="0"/>
           </a:p>
@@ -30275,80 +30383,41 @@
       </p:sp>
       <p:sp>
         <p:nvSpPr>
+          <p:cNvPr id="45" name="Shape 43"/>
+          <p:cNvSpPr/>
+          <p:nvPr/>
+        </p:nvSpPr>
+        <p:spPr>
+          <a:xfrm>
+            <a:off x="4129430" y="4169664"/>
+            <a:ext cx="676656" cy="475488"/>
+          </a:xfrm>
+          <a:prstGeom prst="rect">
+            <a:avLst>
+              <a:gd name="adj" fmla="val 7692"/>
+            </a:avLst>
+          </a:prstGeom>
+          <a:solidFill>
+            <a:srgbClr val="FFFFFF"/>
+          </a:solidFill>
+          <a:ln w="12700">
+            <a:solidFill>
+              <a:srgbClr val="DB2777"/>
+            </a:solidFill>
+            <a:prstDash val="solid"/>
+          </a:ln>
+        </p:spPr>
+      </p:sp>
+      <p:sp>
+        <p:nvSpPr>
           <p:cNvPr id="46" name="Text 44"/>
           <p:cNvSpPr/>
           <p:nvPr/>
         </p:nvSpPr>
         <p:spPr>
           <a:xfrm>
-            <a:off x="4331643" y="4572000"/>
-            <a:ext cx="685800" cy="219456"/>
-          </a:xfrm>
-          <a:prstGeom prst="rect">
-            <a:avLst/>
-          </a:prstGeom>
-          <a:noFill/>
-          <a:ln/>
-        </p:spPr>
-        <p:txBody>
-          <a:bodyPr wrap="square" lIns="0" tIns="0" rIns="0" bIns="0" rtlCol="0" anchor="t"/>
-          <a:lstStyle/>
-          <a:p>
-            <a:pPr algn="ctr" indent="0" marL="0">
-              <a:buNone/>
-            </a:pPr>
-            <a:r>
-              <a:rPr lang="en-US" sz="750" i="1" dirty="0">
-                <a:solidFill>
-                  <a:srgbClr val="94A3B8"/>
-                </a:solidFill>
-                <a:latin typeface="Calibri" pitchFamily="34" charset="0"/>
-                <a:ea typeface="Calibri" pitchFamily="34" charset="-122"/>
-                <a:cs typeface="Calibri" pitchFamily="34" charset="-120"/>
-              </a:rPr>
-              <a:t>/sh/</a:t>
-            </a:r>
-            <a:endParaRPr lang="en-US" sz="750" dirty="0"/>
-          </a:p>
-        </p:txBody>
-      </p:sp>
-      <p:sp>
-        <p:nvSpPr>
-          <p:cNvPr id="47" name="Shape 45"/>
-          <p:cNvSpPr/>
-          <p:nvPr/>
-        </p:nvSpPr>
-        <p:spPr>
-          <a:xfrm>
-            <a:off x="5370141" y="4169664"/>
-            <a:ext cx="685800" cy="384048"/>
-          </a:xfrm>
-          <a:prstGeom prst="rect">
-            <a:avLst>
-              <a:gd name="adj" fmla="val 9524"/>
-            </a:avLst>
-          </a:prstGeom>
-          <a:solidFill>
-            <a:srgbClr val="FFFFFF"/>
-          </a:solidFill>
-          <a:ln w="12700">
-            <a:solidFill>
-              <a:srgbClr val="DB2777"/>
-            </a:solidFill>
-            <a:prstDash val="solid"/>
-          </a:ln>
-        </p:spPr>
-      </p:sp>
-      <p:sp>
-        <p:nvSpPr>
-          <p:cNvPr id="48" name="Text 46"/>
-          <p:cNvSpPr/>
-          <p:nvPr/>
-        </p:nvSpPr>
-        <p:spPr>
-          <a:xfrm>
-            <a:off x="5370141" y="4169664"/>
-            <a:ext cx="685800" cy="384048"/>
+            <a:off x="4129430" y="4169664"/>
+            <a:ext cx="676656" cy="475488"/>
           </a:xfrm>
           <a:prstGeom prst="rect">
             <a:avLst/>
@@ -30372,7 +30441,7 @@
                 <a:ea typeface="Trebuchet MS" pitchFamily="34" charset="-122"/>
                 <a:cs typeface="Trebuchet MS" pitchFamily="34" charset="-120"/>
               </a:rPr>
-              <a:t>i</a:t>
+              <a:t>s</a:t>
             </a:r>
             <a:endParaRPr lang="en-US" sz="900" dirty="0"/>
           </a:p>
@@ -30380,18 +30449,18 @@
       </p:sp>
       <p:sp>
         <p:nvSpPr>
-          <p:cNvPr id="49" name="Shape 47"/>
-          <p:cNvSpPr/>
-          <p:nvPr/>
-        </p:nvSpPr>
-        <p:spPr>
-          <a:xfrm>
-            <a:off x="6408638" y="4169664"/>
-            <a:ext cx="685800" cy="384048"/>
+          <p:cNvPr id="47" name="Shape 45"/>
+          <p:cNvSpPr/>
+          <p:nvPr/>
+        </p:nvSpPr>
+        <p:spPr>
+          <a:xfrm>
+            <a:off x="4855464" y="4169664"/>
+            <a:ext cx="676656" cy="475488"/>
           </a:xfrm>
           <a:prstGeom prst="rect">
             <a:avLst>
-              <a:gd name="adj" fmla="val 9524"/>
+              <a:gd name="adj" fmla="val 7692"/>
             </a:avLst>
           </a:prstGeom>
           <a:solidFill>
@@ -30407,14 +30476,14 @@
       </p:sp>
       <p:sp>
         <p:nvSpPr>
-          <p:cNvPr id="50" name="Text 48"/>
-          <p:cNvSpPr/>
-          <p:nvPr/>
-        </p:nvSpPr>
-        <p:spPr>
-          <a:xfrm>
-            <a:off x="6408638" y="4169664"/>
-            <a:ext cx="685800" cy="384048"/>
+          <p:cNvPr id="48" name="Text 46"/>
+          <p:cNvSpPr/>
+          <p:nvPr/>
+        </p:nvSpPr>
+        <p:spPr>
+          <a:xfrm>
+            <a:off x="4855464" y="4169664"/>
+            <a:ext cx="676656" cy="475488"/>
           </a:xfrm>
           <a:prstGeom prst="rect">
             <a:avLst/>
@@ -30438,7 +30507,7 @@
                 <a:ea typeface="Trebuchet MS" pitchFamily="34" charset="-122"/>
                 <a:cs typeface="Trebuchet MS" pitchFamily="34" charset="-120"/>
               </a:rPr>
-              <a:t>en</a:t>
+              <a:t>c</a:t>
             </a:r>
             <a:endParaRPr lang="en-US" sz="900" dirty="0"/>
           </a:p>
@@ -30446,18 +30515,18 @@
       </p:sp>
       <p:sp>
         <p:nvSpPr>
-          <p:cNvPr id="51" name="Shape 49"/>
-          <p:cNvSpPr/>
-          <p:nvPr/>
-        </p:nvSpPr>
-        <p:spPr>
-          <a:xfrm>
-            <a:off x="7447135" y="4169664"/>
-            <a:ext cx="685800" cy="384048"/>
+          <p:cNvPr id="49" name="Shape 47"/>
+          <p:cNvSpPr/>
+          <p:nvPr/>
+        </p:nvSpPr>
+        <p:spPr>
+          <a:xfrm>
+            <a:off x="5581498" y="4169664"/>
+            <a:ext cx="676656" cy="475488"/>
           </a:xfrm>
           <a:prstGeom prst="rect">
             <a:avLst>
-              <a:gd name="adj" fmla="val 9524"/>
+              <a:gd name="adj" fmla="val 7692"/>
             </a:avLst>
           </a:prstGeom>
           <a:solidFill>
@@ -30473,14 +30542,14 @@
       </p:sp>
       <p:sp>
         <p:nvSpPr>
-          <p:cNvPr id="52" name="Text 50"/>
-          <p:cNvSpPr/>
-          <p:nvPr/>
-        </p:nvSpPr>
-        <p:spPr>
-          <a:xfrm>
-            <a:off x="7447135" y="4169664"/>
-            <a:ext cx="685800" cy="384048"/>
+          <p:cNvPr id="50" name="Text 48"/>
+          <p:cNvSpPr/>
+          <p:nvPr/>
+        </p:nvSpPr>
+        <p:spPr>
+          <a:xfrm>
+            <a:off x="5581498" y="4169664"/>
+            <a:ext cx="676656" cy="475488"/>
           </a:xfrm>
           <a:prstGeom prst="rect">
             <a:avLst/>
@@ -30504,7 +30573,7 @@
                 <a:ea typeface="Trebuchet MS" pitchFamily="34" charset="-122"/>
                 <a:cs typeface="Trebuchet MS" pitchFamily="34" charset="-120"/>
               </a:rPr>
-              <a:t>ce</a:t>
+              <a:t>ie</a:t>
             </a:r>
             <a:endParaRPr lang="en-US" sz="900" dirty="0"/>
           </a:p>
@@ -30512,40 +30581,199 @@
       </p:sp>
       <p:sp>
         <p:nvSpPr>
-          <p:cNvPr id="53" name="Text 51"/>
-          <p:cNvSpPr/>
-          <p:nvPr/>
-        </p:nvSpPr>
-        <p:spPr>
-          <a:xfrm>
-            <a:off x="7447135" y="4572000"/>
-            <a:ext cx="685800" cy="219456"/>
-          </a:xfrm>
-          <a:prstGeom prst="rect">
-            <a:avLst/>
-          </a:prstGeom>
-          <a:noFill/>
-          <a:ln/>
-        </p:spPr>
-        <p:txBody>
-          <a:bodyPr wrap="square" lIns="0" tIns="0" rIns="0" bIns="0" rtlCol="0" anchor="t"/>
-          <a:lstStyle/>
-          <a:p>
-            <a:pPr algn="ctr" indent="0" marL="0">
-              <a:buNone/>
-            </a:pPr>
-            <a:r>
-              <a:rPr lang="en-US" sz="750" i="1" dirty="0">
-                <a:solidFill>
-                  <a:srgbClr val="94A3B8"/>
-                </a:solidFill>
-                <a:latin typeface="Calibri" pitchFamily="34" charset="0"/>
-                <a:ea typeface="Calibri" pitchFamily="34" charset="-122"/>
-                <a:cs typeface="Calibri" pitchFamily="34" charset="-120"/>
-              </a:rPr>
-              <a:t>/s/</a:t>
-            </a:r>
-            <a:endParaRPr lang="en-US" sz="750" dirty="0"/>
+          <p:cNvPr id="51" name="Shape 49"/>
+          <p:cNvSpPr/>
+          <p:nvPr/>
+        </p:nvSpPr>
+        <p:spPr>
+          <a:xfrm>
+            <a:off x="6307531" y="4169664"/>
+            <a:ext cx="676656" cy="475488"/>
+          </a:xfrm>
+          <a:prstGeom prst="rect">
+            <a:avLst>
+              <a:gd name="adj" fmla="val 7692"/>
+            </a:avLst>
+          </a:prstGeom>
+          <a:solidFill>
+            <a:srgbClr val="FFFFFF"/>
+          </a:solidFill>
+          <a:ln w="12700">
+            <a:solidFill>
+              <a:srgbClr val="DB2777"/>
+            </a:solidFill>
+            <a:prstDash val="solid"/>
+          </a:ln>
+        </p:spPr>
+      </p:sp>
+      <p:sp>
+        <p:nvSpPr>
+          <p:cNvPr id="52" name="Text 50"/>
+          <p:cNvSpPr/>
+          <p:nvPr/>
+        </p:nvSpPr>
+        <p:spPr>
+          <a:xfrm>
+            <a:off x="6307531" y="4169664"/>
+            <a:ext cx="676656" cy="475488"/>
+          </a:xfrm>
+          <a:prstGeom prst="rect">
+            <a:avLst/>
+          </a:prstGeom>
+          <a:noFill/>
+          <a:ln/>
+        </p:spPr>
+        <p:txBody>
+          <a:bodyPr wrap="square" lIns="0" tIns="0" rIns="0" bIns="0" rtlCol="0" anchor="ctr"/>
+          <a:lstStyle/>
+          <a:p>
+            <a:pPr algn="ctr" indent="0" marL="0">
+              <a:buNone/>
+            </a:pPr>
+            <a:r>
+              <a:rPr lang="en-US" sz="900" b="1" dirty="0">
+                <a:solidFill>
+                  <a:srgbClr val="9D174D"/>
+                </a:solidFill>
+                <a:latin typeface="Trebuchet MS" pitchFamily="34" charset="0"/>
+                <a:ea typeface="Trebuchet MS" pitchFamily="34" charset="-122"/>
+                <a:cs typeface="Trebuchet MS" pitchFamily="34" charset="-120"/>
+              </a:rPr>
+              <a:t>n</a:t>
+            </a:r>
+            <a:endParaRPr lang="en-US" sz="900" dirty="0"/>
+          </a:p>
+        </p:txBody>
+      </p:sp>
+      <p:sp>
+        <p:nvSpPr>
+          <p:cNvPr id="53" name="Shape 51"/>
+          <p:cNvSpPr/>
+          <p:nvPr/>
+        </p:nvSpPr>
+        <p:spPr>
+          <a:xfrm>
+            <a:off x="7033565" y="4169664"/>
+            <a:ext cx="676656" cy="475488"/>
+          </a:xfrm>
+          <a:prstGeom prst="rect">
+            <a:avLst>
+              <a:gd name="adj" fmla="val 7692"/>
+            </a:avLst>
+          </a:prstGeom>
+          <a:solidFill>
+            <a:srgbClr val="FFFFFF"/>
+          </a:solidFill>
+          <a:ln w="12700">
+            <a:solidFill>
+              <a:srgbClr val="DB2777"/>
+            </a:solidFill>
+            <a:prstDash val="solid"/>
+          </a:ln>
+        </p:spPr>
+      </p:sp>
+      <p:sp>
+        <p:nvSpPr>
+          <p:cNvPr id="54" name="Text 52"/>
+          <p:cNvSpPr/>
+          <p:nvPr/>
+        </p:nvSpPr>
+        <p:spPr>
+          <a:xfrm>
+            <a:off x="7033565" y="4169664"/>
+            <a:ext cx="676656" cy="475488"/>
+          </a:xfrm>
+          <a:prstGeom prst="rect">
+            <a:avLst/>
+          </a:prstGeom>
+          <a:noFill/>
+          <a:ln/>
+        </p:spPr>
+        <p:txBody>
+          <a:bodyPr wrap="square" lIns="0" tIns="0" rIns="0" bIns="0" rtlCol="0" anchor="ctr"/>
+          <a:lstStyle/>
+          <a:p>
+            <a:pPr algn="ctr" indent="0" marL="0">
+              <a:buNone/>
+            </a:pPr>
+            <a:r>
+              <a:rPr lang="en-US" sz="900" b="1" dirty="0">
+                <a:solidFill>
+                  <a:srgbClr val="9D174D"/>
+                </a:solidFill>
+                <a:latin typeface="Trebuchet MS" pitchFamily="34" charset="0"/>
+                <a:ea typeface="Trebuchet MS" pitchFamily="34" charset="-122"/>
+                <a:cs typeface="Trebuchet MS" pitchFamily="34" charset="-120"/>
+              </a:rPr>
+              <a:t>c</a:t>
+            </a:r>
+            <a:endParaRPr lang="en-US" sz="900" dirty="0"/>
+          </a:p>
+        </p:txBody>
+      </p:sp>
+      <p:sp>
+        <p:nvSpPr>
+          <p:cNvPr id="55" name="Shape 53"/>
+          <p:cNvSpPr/>
+          <p:nvPr/>
+        </p:nvSpPr>
+        <p:spPr>
+          <a:xfrm>
+            <a:off x="7759598" y="4169664"/>
+            <a:ext cx="676656" cy="475488"/>
+          </a:xfrm>
+          <a:prstGeom prst="rect">
+            <a:avLst>
+              <a:gd name="adj" fmla="val 7692"/>
+            </a:avLst>
+          </a:prstGeom>
+          <a:solidFill>
+            <a:srgbClr val="FFFFFF"/>
+          </a:solidFill>
+          <a:ln w="12700">
+            <a:solidFill>
+              <a:srgbClr val="DB2777"/>
+            </a:solidFill>
+            <a:prstDash val="solid"/>
+          </a:ln>
+        </p:spPr>
+      </p:sp>
+      <p:sp>
+        <p:nvSpPr>
+          <p:cNvPr id="56" name="Text 54"/>
+          <p:cNvSpPr/>
+          <p:nvPr/>
+        </p:nvSpPr>
+        <p:spPr>
+          <a:xfrm>
+            <a:off x="7759598" y="4169664"/>
+            <a:ext cx="676656" cy="475488"/>
+          </a:xfrm>
+          <a:prstGeom prst="rect">
+            <a:avLst/>
+          </a:prstGeom>
+          <a:noFill/>
+          <a:ln/>
+        </p:spPr>
+        <p:txBody>
+          <a:bodyPr wrap="square" lIns="0" tIns="0" rIns="0" bIns="0" rtlCol="0" anchor="ctr"/>
+          <a:lstStyle/>
+          <a:p>
+            <a:pPr algn="ctr" indent="0" marL="0">
+              <a:buNone/>
+            </a:pPr>
+            <a:r>
+              <a:rPr lang="en-US" sz="900" b="1" dirty="0">
+                <a:solidFill>
+                  <a:srgbClr val="9D174D"/>
+                </a:solidFill>
+                <a:latin typeface="Trebuchet MS" pitchFamily="34" charset="0"/>
+                <a:ea typeface="Trebuchet MS" pitchFamily="34" charset="-122"/>
+                <a:cs typeface="Trebuchet MS" pitchFamily="34" charset="-120"/>
+              </a:rPr>
+              <a:t>e</a:t>
+            </a:r>
+            <a:endParaRPr lang="en-US" sz="900" dirty="0"/>
           </a:p>
         </p:txBody>
       </p:sp>
@@ -35294,11 +35522,11 @@
         <p:spPr>
           <a:xfrm>
             <a:off x="1874520" y="4096512"/>
-            <a:ext cx="6903720" cy="804672"/>
+            <a:ext cx="6903720" cy="658368"/>
           </a:xfrm>
           <a:prstGeom prst="rect">
             <a:avLst>
-              <a:gd name="adj" fmla="val 6818"/>
+              <a:gd name="adj" fmla="val 8333"/>
             </a:avLst>
           </a:prstGeom>
           <a:solidFill>
@@ -35320,12 +35548,12 @@
         </p:nvSpPr>
         <p:spPr>
           <a:xfrm>
-            <a:off x="2023872" y="4169664"/>
-            <a:ext cx="685800" cy="384048"/>
+            <a:off x="1951330" y="4169664"/>
+            <a:ext cx="676656" cy="475488"/>
           </a:xfrm>
           <a:prstGeom prst="rect">
             <a:avLst>
-              <a:gd name="adj" fmla="val 9524"/>
+              <a:gd name="adj" fmla="val 7692"/>
             </a:avLst>
           </a:prstGeom>
           <a:solidFill>
@@ -35347,8 +35575,8 @@
         </p:nvSpPr>
         <p:spPr>
           <a:xfrm>
-            <a:off x="2023872" y="4169664"/>
-            <a:ext cx="685800" cy="384048"/>
+            <a:off x="1951330" y="4169664"/>
+            <a:ext cx="676656" cy="475488"/>
           </a:xfrm>
           <a:prstGeom prst="rect">
             <a:avLst/>
@@ -35386,12 +35614,12 @@
         </p:nvSpPr>
         <p:spPr>
           <a:xfrm>
-            <a:off x="2831592" y="4169664"/>
-            <a:ext cx="685800" cy="384048"/>
+            <a:off x="2677363" y="4169664"/>
+            <a:ext cx="676656" cy="475488"/>
           </a:xfrm>
           <a:prstGeom prst="rect">
             <a:avLst>
-              <a:gd name="adj" fmla="val 9524"/>
+              <a:gd name="adj" fmla="val 7692"/>
             </a:avLst>
           </a:prstGeom>
           <a:solidFill>
@@ -35413,8 +35641,8 @@
         </p:nvSpPr>
         <p:spPr>
           <a:xfrm>
-            <a:off x="2831592" y="4169664"/>
-            <a:ext cx="685800" cy="384048"/>
+            <a:off x="2677363" y="4169664"/>
+            <a:ext cx="676656" cy="475488"/>
           </a:xfrm>
           <a:prstGeom prst="rect">
             <a:avLst/>
@@ -35452,12 +35680,12 @@
         </p:nvSpPr>
         <p:spPr>
           <a:xfrm>
-            <a:off x="3639312" y="4169664"/>
-            <a:ext cx="685800" cy="384048"/>
+            <a:off x="3403397" y="4169664"/>
+            <a:ext cx="676656" cy="475488"/>
           </a:xfrm>
           <a:prstGeom prst="rect">
             <a:avLst>
-              <a:gd name="adj" fmla="val 9524"/>
+              <a:gd name="adj" fmla="val 7692"/>
             </a:avLst>
           </a:prstGeom>
           <a:solidFill>
@@ -35479,8 +35707,8 @@
         </p:nvSpPr>
         <p:spPr>
           <a:xfrm>
-            <a:off x="3639312" y="4169664"/>
-            <a:ext cx="685800" cy="384048"/>
+            <a:off x="3403397" y="4169664"/>
+            <a:ext cx="676656" cy="475488"/>
           </a:xfrm>
           <a:prstGeom prst="rect">
             <a:avLst/>
@@ -35518,12 +35746,12 @@
         </p:nvSpPr>
         <p:spPr>
           <a:xfrm>
-            <a:off x="4447032" y="4169664"/>
-            <a:ext cx="685800" cy="384048"/>
+            <a:off x="4129430" y="4169664"/>
+            <a:ext cx="676656" cy="475488"/>
           </a:xfrm>
           <a:prstGeom prst="rect">
             <a:avLst>
-              <a:gd name="adj" fmla="val 9524"/>
+              <a:gd name="adj" fmla="val 7692"/>
             </a:avLst>
           </a:prstGeom>
           <a:solidFill>
@@ -35545,8 +35773,8 @@
         </p:nvSpPr>
         <p:spPr>
           <a:xfrm>
-            <a:off x="4447032" y="4169664"/>
-            <a:ext cx="685800" cy="384048"/>
+            <a:off x="4129430" y="4169664"/>
+            <a:ext cx="676656" cy="475488"/>
           </a:xfrm>
           <a:prstGeom prst="rect">
             <a:avLst/>
@@ -35584,12 +35812,12 @@
         </p:nvSpPr>
         <p:spPr>
           <a:xfrm>
-            <a:off x="5254752" y="4169664"/>
-            <a:ext cx="685800" cy="384048"/>
+            <a:off x="4855464" y="4169664"/>
+            <a:ext cx="676656" cy="475488"/>
           </a:xfrm>
           <a:prstGeom prst="rect">
             <a:avLst>
-              <a:gd name="adj" fmla="val 9524"/>
+              <a:gd name="adj" fmla="val 7692"/>
             </a:avLst>
           </a:prstGeom>
           <a:solidFill>
@@ -35611,8 +35839,8 @@
         </p:nvSpPr>
         <p:spPr>
           <a:xfrm>
-            <a:off x="5254752" y="4169664"/>
-            <a:ext cx="685800" cy="384048"/>
+            <a:off x="4855464" y="4169664"/>
+            <a:ext cx="676656" cy="475488"/>
           </a:xfrm>
           <a:prstGeom prst="rect">
             <a:avLst/>
@@ -35636,7 +35864,7 @@
                 <a:ea typeface="Trebuchet MS" pitchFamily="34" charset="-122"/>
                 <a:cs typeface="Trebuchet MS" pitchFamily="34" charset="-120"/>
               </a:rPr>
-              <a:t>sh</a:t>
+              <a:t>s</a:t>
             </a:r>
             <a:endParaRPr lang="en-US" sz="900" dirty="0"/>
           </a:p>
@@ -35644,57 +35872,18 @@
       </p:sp>
       <p:sp>
         <p:nvSpPr>
-          <p:cNvPr id="52" name="Text 50"/>
-          <p:cNvSpPr/>
-          <p:nvPr/>
-        </p:nvSpPr>
-        <p:spPr>
-          <a:xfrm>
-            <a:off x="5254752" y="4572000"/>
-            <a:ext cx="685800" cy="219456"/>
-          </a:xfrm>
-          <a:prstGeom prst="rect">
-            <a:avLst/>
-          </a:prstGeom>
-          <a:noFill/>
-          <a:ln/>
-        </p:spPr>
-        <p:txBody>
-          <a:bodyPr wrap="square" lIns="0" tIns="0" rIns="0" bIns="0" rtlCol="0" anchor="t"/>
-          <a:lstStyle/>
-          <a:p>
-            <a:pPr algn="ctr" indent="0" marL="0">
-              <a:buNone/>
-            </a:pPr>
-            <a:r>
-              <a:rPr lang="en-US" sz="750" i="1" dirty="0">
-                <a:solidFill>
-                  <a:srgbClr val="94A3B8"/>
-                </a:solidFill>
-                <a:latin typeface="Calibri" pitchFamily="34" charset="0"/>
-                <a:ea typeface="Calibri" pitchFamily="34" charset="-122"/>
-                <a:cs typeface="Calibri" pitchFamily="34" charset="-120"/>
-              </a:rPr>
-              <a:t>/sh/</a:t>
-            </a:r>
-            <a:endParaRPr lang="en-US" sz="750" dirty="0"/>
-          </a:p>
-        </p:txBody>
-      </p:sp>
-      <p:sp>
-        <p:nvSpPr>
-          <p:cNvPr id="53" name="Shape 51"/>
-          <p:cNvSpPr/>
-          <p:nvPr/>
-        </p:nvSpPr>
-        <p:spPr>
-          <a:xfrm>
-            <a:off x="6062472" y="4169664"/>
-            <a:ext cx="685800" cy="384048"/>
+          <p:cNvPr id="52" name="Shape 50"/>
+          <p:cNvSpPr/>
+          <p:nvPr/>
+        </p:nvSpPr>
+        <p:spPr>
+          <a:xfrm>
+            <a:off x="5581498" y="4169664"/>
+            <a:ext cx="676656" cy="475488"/>
           </a:xfrm>
           <a:prstGeom prst="rect">
             <a:avLst>
-              <a:gd name="adj" fmla="val 9524"/>
+              <a:gd name="adj" fmla="val 7692"/>
             </a:avLst>
           </a:prstGeom>
           <a:solidFill>
@@ -35710,14 +35899,14 @@
       </p:sp>
       <p:sp>
         <p:nvSpPr>
-          <p:cNvPr id="54" name="Text 52"/>
-          <p:cNvSpPr/>
-          <p:nvPr/>
-        </p:nvSpPr>
-        <p:spPr>
-          <a:xfrm>
-            <a:off x="6062472" y="4169664"/>
-            <a:ext cx="685800" cy="384048"/>
+          <p:cNvPr id="53" name="Text 51"/>
+          <p:cNvSpPr/>
+          <p:nvPr/>
+        </p:nvSpPr>
+        <p:spPr>
+          <a:xfrm>
+            <a:off x="5581498" y="4169664"/>
+            <a:ext cx="676656" cy="475488"/>
           </a:xfrm>
           <a:prstGeom prst="rect">
             <a:avLst/>
@@ -35741,7 +35930,7 @@
                 <a:ea typeface="Trebuchet MS" pitchFamily="34" charset="-122"/>
                 <a:cs typeface="Trebuchet MS" pitchFamily="34" charset="-120"/>
               </a:rPr>
-              <a:t>i</a:t>
+              <a:t>c</a:t>
             </a:r>
             <a:endParaRPr lang="en-US" sz="900" dirty="0"/>
           </a:p>
@@ -35749,18 +35938,18 @@
       </p:sp>
       <p:sp>
         <p:nvSpPr>
-          <p:cNvPr id="55" name="Shape 53"/>
-          <p:cNvSpPr/>
-          <p:nvPr/>
-        </p:nvSpPr>
-        <p:spPr>
-          <a:xfrm>
-            <a:off x="6870192" y="4169664"/>
-            <a:ext cx="685800" cy="384048"/>
+          <p:cNvPr id="54" name="Shape 52"/>
+          <p:cNvSpPr/>
+          <p:nvPr/>
+        </p:nvSpPr>
+        <p:spPr>
+          <a:xfrm>
+            <a:off x="6307531" y="4169664"/>
+            <a:ext cx="676656" cy="475488"/>
           </a:xfrm>
           <a:prstGeom prst="rect">
             <a:avLst>
-              <a:gd name="adj" fmla="val 9524"/>
+              <a:gd name="adj" fmla="val 7692"/>
             </a:avLst>
           </a:prstGeom>
           <a:solidFill>
@@ -35776,14 +35965,14 @@
       </p:sp>
       <p:sp>
         <p:nvSpPr>
-          <p:cNvPr id="56" name="Text 54"/>
-          <p:cNvSpPr/>
-          <p:nvPr/>
-        </p:nvSpPr>
-        <p:spPr>
-          <a:xfrm>
-            <a:off x="6870192" y="4169664"/>
-            <a:ext cx="685800" cy="384048"/>
+          <p:cNvPr id="55" name="Text 53"/>
+          <p:cNvSpPr/>
+          <p:nvPr/>
+        </p:nvSpPr>
+        <p:spPr>
+          <a:xfrm>
+            <a:off x="6307531" y="4169664"/>
+            <a:ext cx="676656" cy="475488"/>
           </a:xfrm>
           <a:prstGeom prst="rect">
             <a:avLst/>
@@ -35807,7 +35996,7 @@
                 <a:ea typeface="Trebuchet MS" pitchFamily="34" charset="-122"/>
                 <a:cs typeface="Trebuchet MS" pitchFamily="34" charset="-120"/>
               </a:rPr>
-              <a:t>en</a:t>
+              <a:t>ie</a:t>
             </a:r>
             <a:endParaRPr lang="en-US" sz="900" dirty="0"/>
           </a:p>
@@ -35815,18 +36004,18 @@
       </p:sp>
       <p:sp>
         <p:nvSpPr>
-          <p:cNvPr id="57" name="Shape 55"/>
-          <p:cNvSpPr/>
-          <p:nvPr/>
-        </p:nvSpPr>
-        <p:spPr>
-          <a:xfrm>
-            <a:off x="7677912" y="4169664"/>
-            <a:ext cx="685800" cy="384048"/>
+          <p:cNvPr id="56" name="Shape 54"/>
+          <p:cNvSpPr/>
+          <p:nvPr/>
+        </p:nvSpPr>
+        <p:spPr>
+          <a:xfrm>
+            <a:off x="7033565" y="4169664"/>
+            <a:ext cx="676656" cy="475488"/>
           </a:xfrm>
           <a:prstGeom prst="rect">
             <a:avLst>
-              <a:gd name="adj" fmla="val 9524"/>
+              <a:gd name="adj" fmla="val 7692"/>
             </a:avLst>
           </a:prstGeom>
           <a:solidFill>
@@ -35842,14 +36031,80 @@
       </p:sp>
       <p:sp>
         <p:nvSpPr>
-          <p:cNvPr id="58" name="Text 56"/>
-          <p:cNvSpPr/>
-          <p:nvPr/>
-        </p:nvSpPr>
-        <p:spPr>
-          <a:xfrm>
-            <a:off x="7677912" y="4169664"/>
-            <a:ext cx="685800" cy="384048"/>
+          <p:cNvPr id="57" name="Text 55"/>
+          <p:cNvSpPr/>
+          <p:nvPr/>
+        </p:nvSpPr>
+        <p:spPr>
+          <a:xfrm>
+            <a:off x="7033565" y="4169664"/>
+            <a:ext cx="676656" cy="475488"/>
+          </a:xfrm>
+          <a:prstGeom prst="rect">
+            <a:avLst/>
+          </a:prstGeom>
+          <a:noFill/>
+          <a:ln/>
+        </p:spPr>
+        <p:txBody>
+          <a:bodyPr wrap="square" lIns="0" tIns="0" rIns="0" bIns="0" rtlCol="0" anchor="ctr"/>
+          <a:lstStyle/>
+          <a:p>
+            <a:pPr algn="ctr" indent="0" marL="0">
+              <a:buNone/>
+            </a:pPr>
+            <a:r>
+              <a:rPr lang="en-US" sz="900" b="1" dirty="0">
+                <a:solidFill>
+                  <a:srgbClr val="9D174D"/>
+                </a:solidFill>
+                <a:latin typeface="Trebuchet MS" pitchFamily="34" charset="0"/>
+                <a:ea typeface="Trebuchet MS" pitchFamily="34" charset="-122"/>
+                <a:cs typeface="Trebuchet MS" pitchFamily="34" charset="-120"/>
+              </a:rPr>
+              <a:t>n</a:t>
+            </a:r>
+            <a:endParaRPr lang="en-US" sz="900" dirty="0"/>
+          </a:p>
+        </p:txBody>
+      </p:sp>
+      <p:sp>
+        <p:nvSpPr>
+          <p:cNvPr id="58" name="Shape 56"/>
+          <p:cNvSpPr/>
+          <p:nvPr/>
+        </p:nvSpPr>
+        <p:spPr>
+          <a:xfrm>
+            <a:off x="7759598" y="4169664"/>
+            <a:ext cx="676656" cy="475488"/>
+          </a:xfrm>
+          <a:prstGeom prst="rect">
+            <a:avLst>
+              <a:gd name="adj" fmla="val 7692"/>
+            </a:avLst>
+          </a:prstGeom>
+          <a:solidFill>
+            <a:srgbClr val="FFFFFF"/>
+          </a:solidFill>
+          <a:ln w="12700">
+            <a:solidFill>
+              <a:srgbClr val="DB2777"/>
+            </a:solidFill>
+            <a:prstDash val="solid"/>
+          </a:ln>
+        </p:spPr>
+      </p:sp>
+      <p:sp>
+        <p:nvSpPr>
+          <p:cNvPr id="59" name="Text 57"/>
+          <p:cNvSpPr/>
+          <p:nvPr/>
+        </p:nvSpPr>
+        <p:spPr>
+          <a:xfrm>
+            <a:off x="7759598" y="4169664"/>
+            <a:ext cx="676656" cy="475488"/>
           </a:xfrm>
           <a:prstGeom prst="rect">
             <a:avLst/>
@@ -40408,7 +40663,7 @@
                 <a:ea typeface="Calibri" pitchFamily="34" charset="-122"/>
                 <a:cs typeface="Calibri" pitchFamily="34" charset="-120"/>
               </a:rPr>
-              <a:t>3.  The word 'science' has nothing to do with the root 'sci'.</a:t>
+              <a:t>3.  The root 'sci' comes from a Latin word meaning 'to know'.</a:t>
             </a:r>
             <a:endParaRPr lang="en-US" sz="1300" dirty="0"/>
           </a:p>
@@ -40431,11 +40686,11 @@
             </a:avLst>
           </a:prstGeom>
           <a:solidFill>
-            <a:srgbClr val="FEE2E2"/>
-          </a:solidFill>
-          <a:ln w="12700">
-            <a:solidFill>
-              <a:srgbClr val="DC2626"/>
+            <a:srgbClr val="DCFCE7"/>
+          </a:solidFill>
+          <a:ln w="12700">
+            <a:solidFill>
+              <a:srgbClr val="16A34A"/>
             </a:solidFill>
             <a:prstDash val="solid"/>
           </a:ln>
@@ -40468,13 +40723,13 @@
             <a:r>
               <a:rPr lang="en-US" sz="1100" b="1" dirty="0">
                 <a:solidFill>
-                  <a:srgbClr val="DC2626"/>
+                  <a:srgbClr val="16A34A"/>
                 </a:solidFill>
                 <a:latin typeface="Trebuchet MS" pitchFamily="34" charset="0"/>
                 <a:ea typeface="Trebuchet MS" pitchFamily="34" charset="-122"/>
                 <a:cs typeface="Trebuchet MS" pitchFamily="34" charset="-120"/>
               </a:rPr>
-              <a:t>FALSE</a:t>
+              <a:t>TRUE</a:t>
             </a:r>
             <a:endParaRPr lang="en-US" sz="1100" dirty="0"/>
           </a:p>
@@ -40547,7 +40802,7 @@
                 <a:ea typeface="Calibri" pitchFamily="34" charset="-122"/>
                 <a:cs typeface="Calibri" pitchFamily="34" charset="-120"/>
               </a:rPr>
-              <a:t>4.  The root 'sci' comes from a Latin word meaning 'to know'.</a:t>
+              <a:t>4.  The word 'science' has nothing to do with the root 'sci'.</a:t>
             </a:r>
             <a:endParaRPr lang="en-US" sz="1300" dirty="0"/>
           </a:p>
@@ -40570,11 +40825,11 @@
             </a:avLst>
           </a:prstGeom>
           <a:solidFill>
-            <a:srgbClr val="DCFCE7"/>
-          </a:solidFill>
-          <a:ln w="12700">
-            <a:solidFill>
-              <a:srgbClr val="16A34A"/>
+            <a:srgbClr val="FEE2E2"/>
+          </a:solidFill>
+          <a:ln w="12700">
+            <a:solidFill>
+              <a:srgbClr val="DC2626"/>
             </a:solidFill>
             <a:prstDash val="solid"/>
           </a:ln>
@@ -40607,13 +40862,13 @@
             <a:r>
               <a:rPr lang="en-US" sz="1100" b="1" dirty="0">
                 <a:solidFill>
-                  <a:srgbClr val="16A34A"/>
+                  <a:srgbClr val="DC2626"/>
                 </a:solidFill>
                 <a:latin typeface="Trebuchet MS" pitchFamily="34" charset="0"/>
                 <a:ea typeface="Trebuchet MS" pitchFamily="34" charset="-122"/>
                 <a:cs typeface="Trebuchet MS" pitchFamily="34" charset="-120"/>
               </a:rPr>
-              <a:t>TRUE</a:t>
+              <a:t>FALSE</a:t>
             </a:r>
             <a:endParaRPr lang="en-US" sz="1100" dirty="0"/>
           </a:p>
